--- a/Day_4_All_files_Aug_2026/Claude_Cert_Day4_Integration_MockExam.pptx
+++ b/Day_4_All_files_Aug_2026/Claude_Cert_Day4_Integration_MockExam.pptx
@@ -21456,7 +21456,7 @@
                           <a:ea typeface="Calibri" pitchFamily="34" charset="-122"/>
                           <a:cs typeface="Calibri" pitchFamily="34" charset="-120"/>
                         </a:rPr>
-                        <a:t>Implementation &amp; Tooling</a:t>
+                        <a:t>Tool Design &amp; MCP Integration</a:t>
                       </a:r>
                       <a:endParaRPr lang="en-US" sz="1300" dirty="0">
                         <a:latin typeface="Calibri" charset="0"/>
@@ -21723,7 +21723,7 @@
                           <a:ea typeface="Calibri" pitchFamily="34" charset="-122"/>
                           <a:cs typeface="Calibri" pitchFamily="34" charset="-120"/>
                         </a:rPr>
-                        <a:t>Claude Code &amp; MCP Integration</a:t>
+                        <a:t>Claude Code Configuration &amp; Workflows</a:t>
                       </a:r>
                       <a:endParaRPr lang="en-US" sz="1300" dirty="0">
                         <a:latin typeface="Calibri" charset="0"/>
@@ -21990,7 +21990,7 @@
                           <a:ea typeface="Calibri" pitchFamily="34" charset="-122"/>
                           <a:cs typeface="Calibri" pitchFamily="34" charset="-120"/>
                         </a:rPr>
-                        <a:t>Evaluation &amp; Safety</a:t>
+                        <a:t>Prompt Engineering &amp; Structured Output</a:t>
                       </a:r>
                       <a:endParaRPr lang="en-US" sz="1300" dirty="0">
                         <a:latin typeface="Calibri" charset="0"/>
@@ -22257,7 +22257,7 @@
                           <a:ea typeface="Calibri" pitchFamily="34" charset="-122"/>
                           <a:cs typeface="Calibri" pitchFamily="34" charset="-120"/>
                         </a:rPr>
-                        <a:t>Deployment, Governance &amp; Reliability</a:t>
+                        <a:t>Context Management &amp; Reliability</a:t>
                       </a:r>
                       <a:endParaRPr lang="en-US" sz="1300" dirty="0">
                         <a:latin typeface="Calibri" charset="0"/>
